--- a/day2_molecular_ml/slides.pptx
+++ b/day2_molecular_ml/slides.pptx
@@ -703,7 +703,7 @@
           <a:p/>
           <a:p>
             <a:r>
-              <a:t>7 min. RF: ensemble of independent trees. XGBoost: sequential boosting. Chen &amp; Guestrin 2016 won KDD Best Paper. For tabular data (which molecular features are), XGBoost is still king.</a:t>
+              <a:t>7 min. RF: ensemble of independent trees. XGBoost: sequential boosting. CITATION: Chen &amp; Guestrin (2016) 'XGBoost: A Scalable Tree Boosting System.' KDD '16, pp. 785-794. Won Best Paper at KDD 2016. Breiman (2001) 'Random forests.' Machine Learning 45:5-32 defined Random Forest. For tabular data (which molecular features are), XGBoost is still king.</a:t>
             </a:r>
           </a:p>
           <a:p/>
@@ -1095,7 +1095,7 @@
           <a:p/>
           <a:p>
             <a:r>
-              <a:t>5 min cautionary tales. Wallach &amp; Heifets 2018 showed many published models memorize molecular series.</a:t>
+              <a:t>5 min cautionary tales. CITATION: Wallach &amp; Heifets (2018) 'Most Ligand-Based Classification Benchmarks Reward Memorization Rather than Generalization.' JCIM 58:916-932. Showed many published models memorize molecular series rather than learning generalizable chemical features.</a:t>
             </a:r>
           </a:p>
           <a:p/>
@@ -1177,7 +1177,7 @@
           <a:p/>
           <a:p>
             <a:r>
-              <a:t>5 min. Draw Bemis-Murcko framework: strip molecule to ring systems + linkers. If train and test share scaffolds, the model memorizes scaffolds. Wu et al. 2018 (MoleculeNet) made scaffold splitting the standard.</a:t>
+              <a:t>5 min. Draw Bemis-Murcko framework: strip molecule to ring systems + linkers. If train and test share scaffolds, the model memorizes scaffolds. CITATION: Wu et al. (2018) 'MoleculeNet: A Benchmark for Molecular Machine Learning.' Chemical Science 9:513-530. Made scaffold splitting the standard for evaluation.</a:t>
             </a:r>
           </a:p>
         </p:txBody>
@@ -1481,7 +1481,7 @@
           <a:p/>
           <a:p>
             <a:r>
-              <a:t>3 min. The Jimenez-Luna 2020 paper is the best review for drug discovery interpretability. If a model says a molecule is toxic but can't explain why, the chemist will be skeptical. If it can say 'the nitro group at position 3 drives the toxicity prediction,' the chemist engages.</a:t>
+              <a:t>3 min. CITATION: Jiménez-Luna et al. (2020) 'Drug discovery with explainable artificial intelligence.' Nature Machine Intelligence 2:573-584. The best review for drug discovery interpretability. If a model says a molecule is toxic but can't explain why, the chemist will be skeptical. If it can say 'the nitro group at position 3 drives the toxicity prediction,' the chemist engages.</a:t>
             </a:r>
           </a:p>
         </p:txBody>
@@ -1557,7 +1557,7 @@
           <a:p/>
           <a:p>
             <a:r>
-              <a:t>5 min. Shapley value: each feature is a 'player' in a prediction 'game'. TreeSHAP (Lundberg et al. 2020, Nature MI) is exact and fast for RF/XGBoost.</a:t>
+              <a:t>5 min. Shapley value: each feature is a 'player' in a prediction 'game'. CITATION: Lundberg &amp; Lee (2017) 'A Unified Approach to Interpreting Model Predictions.' NeurIPS 30:4765-4774. TreeSHAP (Lundberg et al. 2020, Nature MI 2:56-67) is exact and fast for RF/XGBoost.</a:t>
             </a:r>
           </a:p>
           <a:p/>
@@ -2171,7 +2171,7 @@
           <a:p/>
           <a:p>
             <a:r>
-              <a:t>Transition to SMILES syntax. Weininger (1988) paper.</a:t>
+              <a:t>Transition to SMILES syntax. Weininger (1988) 'SMILES, a Chemical Language and Information System. 1. Introduction to Methodology and Encoding Rules.' J. Chem. Inf. Comput. Sci. 28:31-36.</a:t>
             </a:r>
           </a:p>
         </p:txBody>
@@ -2506,7 +2506,7 @@
           <a:p/>
           <a:p>
             <a:r>
-              <a:t>Spend 5 min. Barcode analogy. Morgan/ECFP captures local atom neighborhoods at increasing radius. ECFP4 (radius=2, 2048 bits) is the standard. Rogers &amp; Hahn 2010 is the foundational paper.</a:t>
+              <a:t>Spend 5 min. Barcode analogy. Morgan/ECFP captures local atom neighborhoods at increasing radius. ECFP4 (radius=2, 2048 bits) is the standard. CITATION: Rogers &amp; Hahn (2010) 'Extended-Connectivity Fingerprints.' J. Chem. Inf. Model. 50:742-754. This is the foundational paper that formalized ECFP as Morgan fingerprints.</a:t>
             </a:r>
           </a:p>
         </p:txBody>
@@ -2664,7 +2664,7 @@
           <a:p/>
           <a:p>
             <a:r>
-              <a:t>7 min. Lipinski et al. (1997) Adv. Drug Deliv. Rev. 23:3-25 (~14,000 citations). For CNS drugs, BBB adds constraints. Pardridge (2005) NeuroRx 2:3-14.</a:t>
+              <a:t>7 min. CITATION: Lipinski et al. (1997) 'Experimental and computational approaches to estimate solubility and permeability in drug discovery and development settings.' Adv. Drug Deliv. Rev. 23(1-3):3-25. One of the most cited papers in medicinal chemistry. For CNS drugs, BBB adds constraints. Pardridge (2005) 'The blood-brain barrier: Bottleneck in brain drug development.' NeuroRx 2:3-14.</a:t>
             </a:r>
           </a:p>
           <a:p/>
@@ -6588,7 +6588,7 @@
               </a:defRPr>
             </a:pPr>
             <a:r>
-              <a:t>Sheridan (2016, JCIM): XGBoost often &gt; RF for QSAR</a:t>
+              <a:t>Sheridan (2016, JCIM 56:2353-2360): XGBoost modestly &gt; RF for QSAR</a:t>
             </a:r>
           </a:p>
         </p:txBody>
@@ -6939,7 +6939,7 @@
               </a:defRPr>
             </a:pPr>
             <a:r>
-              <a:t>  Delaney (2004), JCICS 44:1000-1005</a:t>
+              <a:t>  Delaney (2004), J. Chem. Inf. Comput. Sci. 44:1000-1005</a:t>
             </a:r>
           </a:p>
           <a:p>
@@ -10032,7 +10032,7 @@
               </a:defRPr>
             </a:pPr>
             <a:r>
-              <a:t>Sahigara et al. (2012), Molecules 17:4791-4810</a:t>
+              <a:t>Sahigara et al. (2012), Molecules 17(5):4791-4810</a:t>
             </a:r>
           </a:p>
           <a:p>

--- a/day2_molecular_ml/slides.pptx
+++ b/day2_molecular_ml/slides.pptx
@@ -12305,7 +12305,7 @@
               </a:defRPr>
             </a:pPr>
             <a:r>
-              <a:t>GABA-A receptor is in the same superfamily as GluCl (Dr. Serbe-Kamp's research)</a:t>
+              <a:t>GABA-A receptor is in the same Cys-loop superfamily as GluCl (ivermectin target)</a:t>
             </a:r>
           </a:p>
         </p:txBody>
